--- a/Tasks/py_exam_1.pptx
+++ b/Tasks/py_exam_1.pptx
@@ -22,26 +22,26 @@
   <p:notesSz cx="6858000" cy="9144000"/>
   <p:embeddedFontLst>
     <p:embeddedFont>
-      <p:font typeface="proxima nova rg" panose="02000506030000020004" charset="0"/>
+      <p:font typeface="DM Sans" panose="020B0604020202020204" charset="0"/>
       <p:regular r:id="rId12"/>
       <p:bold r:id="rId13"/>
       <p:italic r:id="rId14"/>
       <p:boldItalic r:id="rId15"/>
     </p:embeddedFont>
     <p:embeddedFont>
-      <p:font typeface="DM Sans" panose="020B0604020202020204" charset="0"/>
-      <p:regular r:id="rId16"/>
-      <p:bold r:id="rId17"/>
-      <p:italic r:id="rId18"/>
-      <p:boldItalic r:id="rId19"/>
+      <p:font typeface="proxima nova bold" panose="02000506030000020004" charset="0"/>
+      <p:bold r:id="rId16"/>
+    </p:embeddedFont>
+    <p:embeddedFont>
+      <p:font typeface="proxima nova rg" panose="02000506030000020004" charset="0"/>
+      <p:regular r:id="rId17"/>
+      <p:bold r:id="rId18"/>
+      <p:italic r:id="rId19"/>
+      <p:boldItalic r:id="rId20"/>
     </p:embeddedFont>
     <p:embeddedFont>
       <p:font typeface="Viga" panose="020B0604020202020204" charset="0"/>
-      <p:regular r:id="rId20"/>
-    </p:embeddedFont>
-    <p:embeddedFont>
-      <p:font typeface="proxima nova bold" panose="02000506030000020004" charset="0"/>
-      <p:bold r:id="rId21"/>
+      <p:regular r:id="rId21"/>
     </p:embeddedFont>
   </p:embeddedFontLst>
   <p:defaultTextStyle>
@@ -3115,10 +3115,16 @@
           <a:p>
             <a:pPr lvl="0"/>
             <a:r>
+              <a:rPr lang="ru-RU" sz="4800" b="1" dirty="0">
+                <a:latin typeface="+mj-lt"/>
+              </a:rPr>
+              <a:t>Э</a:t>
+            </a:r>
+            <a:r>
               <a:rPr lang="ru-RU" sz="4800" dirty="0">
                 <a:latin typeface="+mj-lt"/>
               </a:rPr>
-              <a:t>Экзамен №1</a:t>
+              <a:t>кзамен №1</a:t>
             </a:r>
             <a:endParaRPr sz="4800" dirty="0">
               <a:latin typeface="+mj-lt"/>
